--- a/examples/engineering-energy-system-demo/outputs/tech-route.pptx
+++ b/examples/engineering-energy-system-demo/outputs/tech-route.pptx
@@ -688,7 +688,7 @@
         </p:nvSpPr>
         <p:spPr>
           <a:xfrm>
-            <a:off x="1002125" y="2842148"/>
+            <a:off x="1002125" y="2783462"/>
             <a:ext cx="1727691" cy="481218"/>
           </a:xfrm>
           <a:prstGeom prst="roundRect">
@@ -727,7 +727,7 @@
         </p:nvSpPr>
         <p:spPr>
           <a:xfrm>
-            <a:off x="1002125" y="3522896"/>
+            <a:off x="1002125" y="3405525"/>
             <a:ext cx="1727691" cy="481218"/>
           </a:xfrm>
           <a:prstGeom prst="roundRect">
@@ -805,7 +805,7 @@
         </p:nvSpPr>
         <p:spPr>
           <a:xfrm>
-            <a:off x="3117139" y="2842148"/>
+            <a:off x="3117139" y="2783462"/>
             <a:ext cx="1727691" cy="481218"/>
           </a:xfrm>
           <a:prstGeom prst="roundRect">
@@ -844,7 +844,7 @@
         </p:nvSpPr>
         <p:spPr>
           <a:xfrm>
-            <a:off x="3117139" y="3522896"/>
+            <a:off x="3117139" y="3405525"/>
             <a:ext cx="1727691" cy="481218"/>
           </a:xfrm>
           <a:prstGeom prst="roundRect">
@@ -922,7 +922,7 @@
         </p:nvSpPr>
         <p:spPr>
           <a:xfrm>
-            <a:off x="5232154" y="2842148"/>
+            <a:off x="5232154" y="2783462"/>
             <a:ext cx="1727691" cy="481218"/>
           </a:xfrm>
           <a:prstGeom prst="roundRect">
@@ -961,7 +961,7 @@
         </p:nvSpPr>
         <p:spPr>
           <a:xfrm>
-            <a:off x="5232154" y="3522896"/>
+            <a:off x="5232154" y="3405525"/>
             <a:ext cx="1727691" cy="481218"/>
           </a:xfrm>
           <a:prstGeom prst="roundRect">
@@ -1039,7 +1039,7 @@
         </p:nvSpPr>
         <p:spPr>
           <a:xfrm>
-            <a:off x="7347168" y="2842148"/>
+            <a:off x="7347168" y="2783462"/>
             <a:ext cx="1727691" cy="481218"/>
           </a:xfrm>
           <a:prstGeom prst="roundRect">
@@ -1078,7 +1078,7 @@
         </p:nvSpPr>
         <p:spPr>
           <a:xfrm>
-            <a:off x="7347168" y="3522896"/>
+            <a:off x="7347168" y="3405525"/>
             <a:ext cx="1727691" cy="481218"/>
           </a:xfrm>
           <a:prstGeom prst="roundRect">
@@ -1156,7 +1156,7 @@
         </p:nvSpPr>
         <p:spPr>
           <a:xfrm>
-            <a:off x="9462182" y="2842148"/>
+            <a:off x="9462182" y="2783462"/>
             <a:ext cx="1727691" cy="481218"/>
           </a:xfrm>
           <a:prstGeom prst="roundRect">
@@ -1195,7 +1195,7 @@
         </p:nvSpPr>
         <p:spPr>
           <a:xfrm>
-            <a:off x="9462182" y="3522896"/>
+            <a:off x="9462182" y="3405525"/>
             <a:ext cx="1727691" cy="481218"/>
           </a:xfrm>
           <a:prstGeom prst="roundRect">
